--- a/docs/pptx/whole/jx-scatter-cg-epi-bmi25.pptx
+++ b/docs/pptx/whole/jx-scatter-cg-epi-bmi25.pptx
@@ -36084,7 +36084,2052 @@
         </p:sp>
         <p:sp>
           <p:nvSpPr>
-            <p:cNvPr id="966" name="tx966"/>
+            <p:cNvPr id="966" name="pg966"/>
+            <p:cNvSpPr/>
+            <p:nvPr/>
+          </p:nvSpPr>
+          <p:spPr>
+            <a:xfrm>
+              <a:off x="1985667" y="2703878"/>
+              <a:ext cx="5500613" cy="2186089"/>
+            </a:xfrm>
+            <a:custGeom>
+              <a:avLst/>
+              <a:pathLst>
+                <a:path w="5500613" h="2186089">
+                  <a:moveTo>
+                    <a:pt x="0" y="2079986"/>
+                  </a:moveTo>
+                  <a:lnTo>
+                    <a:pt x="69628" y="2055748"/>
+                  </a:lnTo>
+                  <a:lnTo>
+                    <a:pt x="139256" y="2031499"/>
+                  </a:lnTo>
+                  <a:lnTo>
+                    <a:pt x="208884" y="2007237"/>
+                  </a:lnTo>
+                  <a:lnTo>
+                    <a:pt x="278512" y="1982962"/>
+                  </a:lnTo>
+                  <a:lnTo>
+                    <a:pt x="348140" y="1958670"/>
+                  </a:lnTo>
+                  <a:lnTo>
+                    <a:pt x="417768" y="1934362"/>
+                  </a:lnTo>
+                  <a:lnTo>
+                    <a:pt x="487396" y="1910035"/>
+                  </a:lnTo>
+                  <a:lnTo>
+                    <a:pt x="557024" y="1885686"/>
+                  </a:lnTo>
+                  <a:lnTo>
+                    <a:pt x="626652" y="1861315"/>
+                  </a:lnTo>
+                  <a:lnTo>
+                    <a:pt x="696280" y="1836918"/>
+                  </a:lnTo>
+                  <a:lnTo>
+                    <a:pt x="765908" y="1812491"/>
+                  </a:lnTo>
+                  <a:lnTo>
+                    <a:pt x="835536" y="1788032"/>
+                  </a:lnTo>
+                  <a:lnTo>
+                    <a:pt x="905164" y="1763537"/>
+                  </a:lnTo>
+                  <a:lnTo>
+                    <a:pt x="974792" y="1739001"/>
+                  </a:lnTo>
+                  <a:lnTo>
+                    <a:pt x="1044420" y="1714419"/>
+                  </a:lnTo>
+                  <a:lnTo>
+                    <a:pt x="1114048" y="1689786"/>
+                  </a:lnTo>
+                  <a:lnTo>
+                    <a:pt x="1183676" y="1665095"/>
+                  </a:lnTo>
+                  <a:lnTo>
+                    <a:pt x="1253304" y="1640340"/>
+                  </a:lnTo>
+                  <a:lnTo>
+                    <a:pt x="1322932" y="1615512"/>
+                  </a:lnTo>
+                  <a:lnTo>
+                    <a:pt x="1392560" y="1590604"/>
+                  </a:lnTo>
+                  <a:lnTo>
+                    <a:pt x="1462188" y="1565607"/>
+                  </a:lnTo>
+                  <a:lnTo>
+                    <a:pt x="1531816" y="1540511"/>
+                  </a:lnTo>
+                  <a:lnTo>
+                    <a:pt x="1601444" y="1515308"/>
+                  </a:lnTo>
+                  <a:lnTo>
+                    <a:pt x="1671072" y="1489990"/>
+                  </a:lnTo>
+                  <a:lnTo>
+                    <a:pt x="1740700" y="1464548"/>
+                  </a:lnTo>
+                  <a:lnTo>
+                    <a:pt x="1810328" y="1438978"/>
+                  </a:lnTo>
+                  <a:lnTo>
+                    <a:pt x="1879956" y="1413274"/>
+                  </a:lnTo>
+                  <a:lnTo>
+                    <a:pt x="1949584" y="1387434"/>
+                  </a:lnTo>
+                  <a:lnTo>
+                    <a:pt x="2019212" y="1361460"/>
+                  </a:lnTo>
+                  <a:lnTo>
+                    <a:pt x="2088840" y="1335353"/>
+                  </a:lnTo>
+                  <a:lnTo>
+                    <a:pt x="2158468" y="1309119"/>
+                  </a:lnTo>
+                  <a:lnTo>
+                    <a:pt x="2228096" y="1282764"/>
+                  </a:lnTo>
+                  <a:lnTo>
+                    <a:pt x="2297724" y="1256296"/>
+                  </a:lnTo>
+                  <a:lnTo>
+                    <a:pt x="2367352" y="1229724"/>
+                  </a:lnTo>
+                  <a:lnTo>
+                    <a:pt x="2436980" y="1203056"/>
+                  </a:lnTo>
+                  <a:lnTo>
+                    <a:pt x="2506608" y="1176302"/>
+                  </a:lnTo>
+                  <a:lnTo>
+                    <a:pt x="2576236" y="1149470"/>
+                  </a:lnTo>
+                  <a:lnTo>
+                    <a:pt x="2645864" y="1122568"/>
+                  </a:lnTo>
+                  <a:lnTo>
+                    <a:pt x="2715492" y="1095604"/>
+                  </a:lnTo>
+                  <a:lnTo>
+                    <a:pt x="2785120" y="1068584"/>
+                  </a:lnTo>
+                  <a:lnTo>
+                    <a:pt x="2854748" y="1041515"/>
+                  </a:lnTo>
+                  <a:lnTo>
+                    <a:pt x="2924376" y="1014401"/>
+                  </a:lnTo>
+                  <a:lnTo>
+                    <a:pt x="2994004" y="987248"/>
+                  </a:lnTo>
+                  <a:lnTo>
+                    <a:pt x="3063632" y="960060"/>
+                  </a:lnTo>
+                  <a:lnTo>
+                    <a:pt x="3133260" y="932841"/>
+                  </a:lnTo>
+                  <a:lnTo>
+                    <a:pt x="3202888" y="905594"/>
+                  </a:lnTo>
+                  <a:lnTo>
+                    <a:pt x="3272516" y="878322"/>
+                  </a:lnTo>
+                  <a:lnTo>
+                    <a:pt x="3342144" y="851027"/>
+                  </a:lnTo>
+                  <a:lnTo>
+                    <a:pt x="3411772" y="823712"/>
+                  </a:lnTo>
+                  <a:lnTo>
+                    <a:pt x="3481400" y="796378"/>
+                  </a:lnTo>
+                  <a:lnTo>
+                    <a:pt x="3551028" y="769029"/>
+                  </a:lnTo>
+                  <a:lnTo>
+                    <a:pt x="3620656" y="741664"/>
+                  </a:lnTo>
+                  <a:lnTo>
+                    <a:pt x="3690284" y="714285"/>
+                  </a:lnTo>
+                  <a:lnTo>
+                    <a:pt x="3759912" y="686894"/>
+                  </a:lnTo>
+                  <a:lnTo>
+                    <a:pt x="3829540" y="659492"/>
+                  </a:lnTo>
+                  <a:lnTo>
+                    <a:pt x="3899168" y="632080"/>
+                  </a:lnTo>
+                  <a:lnTo>
+                    <a:pt x="3968796" y="604658"/>
+                  </a:lnTo>
+                  <a:lnTo>
+                    <a:pt x="4038424" y="577228"/>
+                  </a:lnTo>
+                  <a:lnTo>
+                    <a:pt x="4108052" y="549789"/>
+                  </a:lnTo>
+                  <a:lnTo>
+                    <a:pt x="4177680" y="522343"/>
+                  </a:lnTo>
+                  <a:lnTo>
+                    <a:pt x="4247308" y="494891"/>
+                  </a:lnTo>
+                  <a:lnTo>
+                    <a:pt x="4316936" y="467432"/>
+                  </a:lnTo>
+                  <a:lnTo>
+                    <a:pt x="4386564" y="439968"/>
+                  </a:lnTo>
+                  <a:lnTo>
+                    <a:pt x="4456192" y="412498"/>
+                  </a:lnTo>
+                  <a:lnTo>
+                    <a:pt x="4525820" y="385023"/>
+                  </a:lnTo>
+                  <a:lnTo>
+                    <a:pt x="4595448" y="357543"/>
+                  </a:lnTo>
+                  <a:lnTo>
+                    <a:pt x="4665077" y="330059"/>
+                  </a:lnTo>
+                  <a:lnTo>
+                    <a:pt x="4734705" y="302571"/>
+                  </a:lnTo>
+                  <a:lnTo>
+                    <a:pt x="4804333" y="275080"/>
+                  </a:lnTo>
+                  <a:lnTo>
+                    <a:pt x="4873961" y="247584"/>
+                  </a:lnTo>
+                  <a:lnTo>
+                    <a:pt x="4943589" y="220086"/>
+                  </a:lnTo>
+                  <a:lnTo>
+                    <a:pt x="5013217" y="192584"/>
+                  </a:lnTo>
+                  <a:lnTo>
+                    <a:pt x="5082845" y="165079"/>
+                  </a:lnTo>
+                  <a:lnTo>
+                    <a:pt x="5152473" y="137572"/>
+                  </a:lnTo>
+                  <a:lnTo>
+                    <a:pt x="5222101" y="110062"/>
+                  </a:lnTo>
+                  <a:lnTo>
+                    <a:pt x="5291729" y="82550"/>
+                  </a:lnTo>
+                  <a:lnTo>
+                    <a:pt x="5361357" y="55035"/>
+                  </a:lnTo>
+                  <a:lnTo>
+                    <a:pt x="5430985" y="27518"/>
+                  </a:lnTo>
+                  <a:lnTo>
+                    <a:pt x="5500613" y="0"/>
+                  </a:lnTo>
+                  <a:lnTo>
+                    <a:pt x="5500613" y="186818"/>
+                  </a:lnTo>
+                  <a:lnTo>
+                    <a:pt x="5430985" y="210935"/>
+                  </a:lnTo>
+                  <a:lnTo>
+                    <a:pt x="5361357" y="235054"/>
+                  </a:lnTo>
+                  <a:lnTo>
+                    <a:pt x="5291729" y="259176"/>
+                  </a:lnTo>
+                  <a:lnTo>
+                    <a:pt x="5222101" y="283300"/>
+                  </a:lnTo>
+                  <a:lnTo>
+                    <a:pt x="5152473" y="307426"/>
+                  </a:lnTo>
+                  <a:lnTo>
+                    <a:pt x="5082845" y="331555"/>
+                  </a:lnTo>
+                  <a:lnTo>
+                    <a:pt x="5013217" y="355686"/>
+                  </a:lnTo>
+                  <a:lnTo>
+                    <a:pt x="4943589" y="379821"/>
+                  </a:lnTo>
+                  <a:lnTo>
+                    <a:pt x="4873961" y="403958"/>
+                  </a:lnTo>
+                  <a:lnTo>
+                    <a:pt x="4804333" y="428099"/>
+                  </a:lnTo>
+                  <a:lnTo>
+                    <a:pt x="4734705" y="452244"/>
+                  </a:lnTo>
+                  <a:lnTo>
+                    <a:pt x="4665077" y="476392"/>
+                  </a:lnTo>
+                  <a:lnTo>
+                    <a:pt x="4595448" y="500544"/>
+                  </a:lnTo>
+                  <a:lnTo>
+                    <a:pt x="4525820" y="524701"/>
+                  </a:lnTo>
+                  <a:lnTo>
+                    <a:pt x="4456192" y="548862"/>
+                  </a:lnTo>
+                  <a:lnTo>
+                    <a:pt x="4386564" y="573028"/>
+                  </a:lnTo>
+                  <a:lnTo>
+                    <a:pt x="4316936" y="597200"/>
+                  </a:lnTo>
+                  <a:lnTo>
+                    <a:pt x="4247308" y="621377"/>
+                  </a:lnTo>
+                  <a:lnTo>
+                    <a:pt x="4177680" y="645561"/>
+                  </a:lnTo>
+                  <a:lnTo>
+                    <a:pt x="4108052" y="669751"/>
+                  </a:lnTo>
+                  <a:lnTo>
+                    <a:pt x="4038424" y="693949"/>
+                  </a:lnTo>
+                  <a:lnTo>
+                    <a:pt x="3968796" y="718155"/>
+                  </a:lnTo>
+                  <a:lnTo>
+                    <a:pt x="3899168" y="742369"/>
+                  </a:lnTo>
+                  <a:lnTo>
+                    <a:pt x="3829540" y="766593"/>
+                  </a:lnTo>
+                  <a:lnTo>
+                    <a:pt x="3759912" y="790827"/>
+                  </a:lnTo>
+                  <a:lnTo>
+                    <a:pt x="3690284" y="815072"/>
+                  </a:lnTo>
+                  <a:lnTo>
+                    <a:pt x="3620656" y="839330"/>
+                  </a:lnTo>
+                  <a:lnTo>
+                    <a:pt x="3551028" y="863601"/>
+                  </a:lnTo>
+                  <a:lnTo>
+                    <a:pt x="3481400" y="887888"/>
+                  </a:lnTo>
+                  <a:lnTo>
+                    <a:pt x="3411772" y="912191"/>
+                  </a:lnTo>
+                  <a:lnTo>
+                    <a:pt x="3342144" y="936512"/>
+                  </a:lnTo>
+                  <a:lnTo>
+                    <a:pt x="3272516" y="960853"/>
+                  </a:lnTo>
+                  <a:lnTo>
+                    <a:pt x="3202888" y="985217"/>
+                  </a:lnTo>
+                  <a:lnTo>
+                    <a:pt x="3133260" y="1009606"/>
+                  </a:lnTo>
+                  <a:lnTo>
+                    <a:pt x="3063632" y="1034023"/>
+                  </a:lnTo>
+                  <a:lnTo>
+                    <a:pt x="2994004" y="1058471"/>
+                  </a:lnTo>
+                  <a:lnTo>
+                    <a:pt x="2924376" y="1082954"/>
+                  </a:lnTo>
+                  <a:lnTo>
+                    <a:pt x="2854748" y="1107477"/>
+                  </a:lnTo>
+                  <a:lnTo>
+                    <a:pt x="2785120" y="1132044"/>
+                  </a:lnTo>
+                  <a:lnTo>
+                    <a:pt x="2715492" y="1156660"/>
+                  </a:lnTo>
+                  <a:lnTo>
+                    <a:pt x="2645864" y="1181332"/>
+                  </a:lnTo>
+                  <a:lnTo>
+                    <a:pt x="2576236" y="1206066"/>
+                  </a:lnTo>
+                  <a:lnTo>
+                    <a:pt x="2506608" y="1230871"/>
+                  </a:lnTo>
+                  <a:lnTo>
+                    <a:pt x="2436980" y="1255753"/>
+                  </a:lnTo>
+                  <a:lnTo>
+                    <a:pt x="2367352" y="1280721"/>
+                  </a:lnTo>
+                  <a:lnTo>
+                    <a:pt x="2297724" y="1305785"/>
+                  </a:lnTo>
+                  <a:lnTo>
+                    <a:pt x="2228096" y="1330953"/>
+                  </a:lnTo>
+                  <a:lnTo>
+                    <a:pt x="2158468" y="1356234"/>
+                  </a:lnTo>
+                  <a:lnTo>
+                    <a:pt x="2088840" y="1381636"/>
+                  </a:lnTo>
+                  <a:lnTo>
+                    <a:pt x="2019212" y="1407166"/>
+                  </a:lnTo>
+                  <a:lnTo>
+                    <a:pt x="1949584" y="1432828"/>
+                  </a:lnTo>
+                  <a:lnTo>
+                    <a:pt x="1879956" y="1458624"/>
+                  </a:lnTo>
+                  <a:lnTo>
+                    <a:pt x="1810328" y="1484557"/>
+                  </a:lnTo>
+                  <a:lnTo>
+                    <a:pt x="1740700" y="1510622"/>
+                  </a:lnTo>
+                  <a:lnTo>
+                    <a:pt x="1671072" y="1536817"/>
+                  </a:lnTo>
+                  <a:lnTo>
+                    <a:pt x="1601444" y="1563135"/>
+                  </a:lnTo>
+                  <a:lnTo>
+                    <a:pt x="1531816" y="1589568"/>
+                  </a:lnTo>
+                  <a:lnTo>
+                    <a:pt x="1462188" y="1616109"/>
+                  </a:lnTo>
+                  <a:lnTo>
+                    <a:pt x="1392560" y="1642747"/>
+                  </a:lnTo>
+                  <a:lnTo>
+                    <a:pt x="1322932" y="1669475"/>
+                  </a:lnTo>
+                  <a:lnTo>
+                    <a:pt x="1253304" y="1696284"/>
+                  </a:lnTo>
+                  <a:lnTo>
+                    <a:pt x="1183676" y="1723164"/>
+                  </a:lnTo>
+                  <a:lnTo>
+                    <a:pt x="1114048" y="1750110"/>
+                  </a:lnTo>
+                  <a:lnTo>
+                    <a:pt x="1044420" y="1777113"/>
+                  </a:lnTo>
+                  <a:lnTo>
+                    <a:pt x="974792" y="1804167"/>
+                  </a:lnTo>
+                  <a:lnTo>
+                    <a:pt x="905164" y="1831267"/>
+                  </a:lnTo>
+                  <a:lnTo>
+                    <a:pt x="835536" y="1858408"/>
+                  </a:lnTo>
+                  <a:lnTo>
+                    <a:pt x="765908" y="1885586"/>
+                  </a:lnTo>
+                  <a:lnTo>
+                    <a:pt x="696280" y="1912795"/>
+                  </a:lnTo>
+                  <a:lnTo>
+                    <a:pt x="626652" y="1940034"/>
+                  </a:lnTo>
+                  <a:lnTo>
+                    <a:pt x="557024" y="1967299"/>
+                  </a:lnTo>
+                  <a:lnTo>
+                    <a:pt x="487396" y="1994587"/>
+                  </a:lnTo>
+                  <a:lnTo>
+                    <a:pt x="417768" y="2021896"/>
+                  </a:lnTo>
+                  <a:lnTo>
+                    <a:pt x="348140" y="2049224"/>
+                  </a:lnTo>
+                  <a:lnTo>
+                    <a:pt x="278512" y="2076568"/>
+                  </a:lnTo>
+                  <a:lnTo>
+                    <a:pt x="208884" y="2103929"/>
+                  </a:lnTo>
+                  <a:lnTo>
+                    <a:pt x="139256" y="2131303"/>
+                  </a:lnTo>
+                  <a:lnTo>
+                    <a:pt x="69628" y="2158690"/>
+                  </a:lnTo>
+                  <a:lnTo>
+                    <a:pt x="0" y="2186089"/>
+                  </a:lnTo>
+                  <a:close/>
+                </a:path>
+              </a:pathLst>
+            </a:custGeom>
+            <a:solidFill>
+              <a:srgbClr val="999999">
+                <a:alpha val="14901"/>
+              </a:srgbClr>
+            </a:solidFill>
+          </p:spPr>
+          <p:txBody>
+            <a:bodyPr/>
+            <a:lstStyle/>
+            <a:p/>
+          </p:txBody>
+        </p:sp>
+        <p:sp>
+          <p:nvSpPr>
+            <p:cNvPr id="967" name="pl967"/>
+            <p:cNvSpPr/>
+            <p:nvPr/>
+          </p:nvSpPr>
+          <p:spPr>
+            <a:xfrm>
+              <a:off x="1985667" y="2703878"/>
+              <a:ext cx="5500613" cy="2079986"/>
+            </a:xfrm>
+            <a:custGeom>
+              <a:avLst/>
+              <a:pathLst>
+                <a:path w="5500613" h="2079986">
+                  <a:moveTo>
+                    <a:pt x="0" y="2079986"/>
+                  </a:moveTo>
+                  <a:lnTo>
+                    <a:pt x="69628" y="2055748"/>
+                  </a:lnTo>
+                  <a:lnTo>
+                    <a:pt x="139256" y="2031499"/>
+                  </a:lnTo>
+                  <a:lnTo>
+                    <a:pt x="208884" y="2007237"/>
+                  </a:lnTo>
+                  <a:lnTo>
+                    <a:pt x="278512" y="1982962"/>
+                  </a:lnTo>
+                  <a:lnTo>
+                    <a:pt x="348140" y="1958670"/>
+                  </a:lnTo>
+                  <a:lnTo>
+                    <a:pt x="417768" y="1934362"/>
+                  </a:lnTo>
+                  <a:lnTo>
+                    <a:pt x="487396" y="1910035"/>
+                  </a:lnTo>
+                  <a:lnTo>
+                    <a:pt x="557024" y="1885686"/>
+                  </a:lnTo>
+                  <a:lnTo>
+                    <a:pt x="626652" y="1861315"/>
+                  </a:lnTo>
+                  <a:lnTo>
+                    <a:pt x="696280" y="1836918"/>
+                  </a:lnTo>
+                  <a:lnTo>
+                    <a:pt x="765908" y="1812491"/>
+                  </a:lnTo>
+                  <a:lnTo>
+                    <a:pt x="835536" y="1788032"/>
+                  </a:lnTo>
+                  <a:lnTo>
+                    <a:pt x="905164" y="1763537"/>
+                  </a:lnTo>
+                  <a:lnTo>
+                    <a:pt x="974792" y="1739001"/>
+                  </a:lnTo>
+                  <a:lnTo>
+                    <a:pt x="1044420" y="1714419"/>
+                  </a:lnTo>
+                  <a:lnTo>
+                    <a:pt x="1114048" y="1689786"/>
+                  </a:lnTo>
+                  <a:lnTo>
+                    <a:pt x="1183676" y="1665095"/>
+                  </a:lnTo>
+                  <a:lnTo>
+                    <a:pt x="1253304" y="1640340"/>
+                  </a:lnTo>
+                  <a:lnTo>
+                    <a:pt x="1322932" y="1615512"/>
+                  </a:lnTo>
+                  <a:lnTo>
+                    <a:pt x="1392560" y="1590604"/>
+                  </a:lnTo>
+                  <a:lnTo>
+                    <a:pt x="1462188" y="1565607"/>
+                  </a:lnTo>
+                  <a:lnTo>
+                    <a:pt x="1531816" y="1540511"/>
+                  </a:lnTo>
+                  <a:lnTo>
+                    <a:pt x="1601444" y="1515308"/>
+                  </a:lnTo>
+                  <a:lnTo>
+                    <a:pt x="1671072" y="1489990"/>
+                  </a:lnTo>
+                  <a:lnTo>
+                    <a:pt x="1740700" y="1464548"/>
+                  </a:lnTo>
+                  <a:lnTo>
+                    <a:pt x="1810328" y="1438978"/>
+                  </a:lnTo>
+                  <a:lnTo>
+                    <a:pt x="1879956" y="1413274"/>
+                  </a:lnTo>
+                  <a:lnTo>
+                    <a:pt x="1949584" y="1387434"/>
+                  </a:lnTo>
+                  <a:lnTo>
+                    <a:pt x="2019212" y="1361460"/>
+                  </a:lnTo>
+                  <a:lnTo>
+                    <a:pt x="2088840" y="1335353"/>
+                  </a:lnTo>
+                  <a:lnTo>
+                    <a:pt x="2158468" y="1309119"/>
+                  </a:lnTo>
+                  <a:lnTo>
+                    <a:pt x="2228096" y="1282764"/>
+                  </a:lnTo>
+                  <a:lnTo>
+                    <a:pt x="2297724" y="1256296"/>
+                  </a:lnTo>
+                  <a:lnTo>
+                    <a:pt x="2367352" y="1229724"/>
+                  </a:lnTo>
+                  <a:lnTo>
+                    <a:pt x="2436980" y="1203056"/>
+                  </a:lnTo>
+                  <a:lnTo>
+                    <a:pt x="2506608" y="1176302"/>
+                  </a:lnTo>
+                  <a:lnTo>
+                    <a:pt x="2576236" y="1149470"/>
+                  </a:lnTo>
+                  <a:lnTo>
+                    <a:pt x="2645864" y="1122568"/>
+                  </a:lnTo>
+                  <a:lnTo>
+                    <a:pt x="2715492" y="1095604"/>
+                  </a:lnTo>
+                  <a:lnTo>
+                    <a:pt x="2785120" y="1068584"/>
+                  </a:lnTo>
+                  <a:lnTo>
+                    <a:pt x="2854748" y="1041515"/>
+                  </a:lnTo>
+                  <a:lnTo>
+                    <a:pt x="2924376" y="1014401"/>
+                  </a:lnTo>
+                  <a:lnTo>
+                    <a:pt x="2994004" y="987248"/>
+                  </a:lnTo>
+                  <a:lnTo>
+                    <a:pt x="3063632" y="960060"/>
+                  </a:lnTo>
+                  <a:lnTo>
+                    <a:pt x="3133260" y="932841"/>
+                  </a:lnTo>
+                  <a:lnTo>
+                    <a:pt x="3202888" y="905594"/>
+                  </a:lnTo>
+                  <a:lnTo>
+                    <a:pt x="3272516" y="878322"/>
+                  </a:lnTo>
+                  <a:lnTo>
+                    <a:pt x="3342144" y="851027"/>
+                  </a:lnTo>
+                  <a:lnTo>
+                    <a:pt x="3411772" y="823712"/>
+                  </a:lnTo>
+                  <a:lnTo>
+                    <a:pt x="3481400" y="796378"/>
+                  </a:lnTo>
+                  <a:lnTo>
+                    <a:pt x="3551028" y="769029"/>
+                  </a:lnTo>
+                  <a:lnTo>
+                    <a:pt x="3620656" y="741664"/>
+                  </a:lnTo>
+                  <a:lnTo>
+                    <a:pt x="3690284" y="714285"/>
+                  </a:lnTo>
+                  <a:lnTo>
+                    <a:pt x="3759912" y="686894"/>
+                  </a:lnTo>
+                  <a:lnTo>
+                    <a:pt x="3829540" y="659492"/>
+                  </a:lnTo>
+                  <a:lnTo>
+                    <a:pt x="3899168" y="632080"/>
+                  </a:lnTo>
+                  <a:lnTo>
+                    <a:pt x="3968796" y="604658"/>
+                  </a:lnTo>
+                  <a:lnTo>
+                    <a:pt x="4038424" y="577228"/>
+                  </a:lnTo>
+                  <a:lnTo>
+                    <a:pt x="4108052" y="549789"/>
+                  </a:lnTo>
+                  <a:lnTo>
+                    <a:pt x="4177680" y="522343"/>
+                  </a:lnTo>
+                  <a:lnTo>
+                    <a:pt x="4247308" y="494891"/>
+                  </a:lnTo>
+                  <a:lnTo>
+                    <a:pt x="4316936" y="467432"/>
+                  </a:lnTo>
+                  <a:lnTo>
+                    <a:pt x="4386564" y="439968"/>
+                  </a:lnTo>
+                  <a:lnTo>
+                    <a:pt x="4456192" y="412498"/>
+                  </a:lnTo>
+                  <a:lnTo>
+                    <a:pt x="4525820" y="385023"/>
+                  </a:lnTo>
+                  <a:lnTo>
+                    <a:pt x="4595448" y="357543"/>
+                  </a:lnTo>
+                  <a:lnTo>
+                    <a:pt x="4665077" y="330059"/>
+                  </a:lnTo>
+                  <a:lnTo>
+                    <a:pt x="4734705" y="302571"/>
+                  </a:lnTo>
+                  <a:lnTo>
+                    <a:pt x="4804333" y="275080"/>
+                  </a:lnTo>
+                  <a:lnTo>
+                    <a:pt x="4873961" y="247584"/>
+                  </a:lnTo>
+                  <a:lnTo>
+                    <a:pt x="4943589" y="220086"/>
+                  </a:lnTo>
+                  <a:lnTo>
+                    <a:pt x="5013217" y="192584"/>
+                  </a:lnTo>
+                  <a:lnTo>
+                    <a:pt x="5082845" y="165079"/>
+                  </a:lnTo>
+                  <a:lnTo>
+                    <a:pt x="5152473" y="137572"/>
+                  </a:lnTo>
+                  <a:lnTo>
+                    <a:pt x="5222101" y="110062"/>
+                  </a:lnTo>
+                  <a:lnTo>
+                    <a:pt x="5291729" y="82550"/>
+                  </a:lnTo>
+                  <a:lnTo>
+                    <a:pt x="5361357" y="55035"/>
+                  </a:lnTo>
+                  <a:lnTo>
+                    <a:pt x="5430985" y="27518"/>
+                  </a:lnTo>
+                  <a:lnTo>
+                    <a:pt x="5500613" y="0"/>
+                  </a:lnTo>
+                </a:path>
+              </a:pathLst>
+            </a:custGeom>
+          </p:spPr>
+          <p:txBody>
+            <a:bodyPr/>
+            <a:lstStyle/>
+            <a:p/>
+          </p:txBody>
+        </p:sp>
+        <p:sp>
+          <p:nvSpPr>
+            <p:cNvPr id="968" name="pl968"/>
+            <p:cNvSpPr/>
+            <p:nvPr/>
+          </p:nvSpPr>
+          <p:spPr>
+            <a:xfrm>
+              <a:off x="1985667" y="2890696"/>
+              <a:ext cx="5500613" cy="1999271"/>
+            </a:xfrm>
+            <a:custGeom>
+              <a:avLst/>
+              <a:pathLst>
+                <a:path w="5500613" h="1999271">
+                  <a:moveTo>
+                    <a:pt x="5500613" y="0"/>
+                  </a:moveTo>
+                  <a:lnTo>
+                    <a:pt x="5430985" y="24117"/>
+                  </a:lnTo>
+                  <a:lnTo>
+                    <a:pt x="5361357" y="48236"/>
+                  </a:lnTo>
+                  <a:lnTo>
+                    <a:pt x="5291729" y="72358"/>
+                  </a:lnTo>
+                  <a:lnTo>
+                    <a:pt x="5222101" y="96482"/>
+                  </a:lnTo>
+                  <a:lnTo>
+                    <a:pt x="5152473" y="120608"/>
+                  </a:lnTo>
+                  <a:lnTo>
+                    <a:pt x="5082845" y="144737"/>
+                  </a:lnTo>
+                  <a:lnTo>
+                    <a:pt x="5013217" y="168868"/>
+                  </a:lnTo>
+                  <a:lnTo>
+                    <a:pt x="4943589" y="193003"/>
+                  </a:lnTo>
+                  <a:lnTo>
+                    <a:pt x="4873961" y="217140"/>
+                  </a:lnTo>
+                  <a:lnTo>
+                    <a:pt x="4804333" y="241281"/>
+                  </a:lnTo>
+                  <a:lnTo>
+                    <a:pt x="4734705" y="265426"/>
+                  </a:lnTo>
+                  <a:lnTo>
+                    <a:pt x="4665077" y="289574"/>
+                  </a:lnTo>
+                  <a:lnTo>
+                    <a:pt x="4595448" y="313726"/>
+                  </a:lnTo>
+                  <a:lnTo>
+                    <a:pt x="4525820" y="337883"/>
+                  </a:lnTo>
+                  <a:lnTo>
+                    <a:pt x="4456192" y="362044"/>
+                  </a:lnTo>
+                  <a:lnTo>
+                    <a:pt x="4386564" y="386210"/>
+                  </a:lnTo>
+                  <a:lnTo>
+                    <a:pt x="4316936" y="410382"/>
+                  </a:lnTo>
+                  <a:lnTo>
+                    <a:pt x="4247308" y="434559"/>
+                  </a:lnTo>
+                  <a:lnTo>
+                    <a:pt x="4177680" y="458743"/>
+                  </a:lnTo>
+                  <a:lnTo>
+                    <a:pt x="4108052" y="482933"/>
+                  </a:lnTo>
+                  <a:lnTo>
+                    <a:pt x="4038424" y="507131"/>
+                  </a:lnTo>
+                  <a:lnTo>
+                    <a:pt x="3968796" y="531337"/>
+                  </a:lnTo>
+                  <a:lnTo>
+                    <a:pt x="3899168" y="555551"/>
+                  </a:lnTo>
+                  <a:lnTo>
+                    <a:pt x="3829540" y="579775"/>
+                  </a:lnTo>
+                  <a:lnTo>
+                    <a:pt x="3759912" y="604009"/>
+                  </a:lnTo>
+                  <a:lnTo>
+                    <a:pt x="3690284" y="628254"/>
+                  </a:lnTo>
+                  <a:lnTo>
+                    <a:pt x="3620656" y="652512"/>
+                  </a:lnTo>
+                  <a:lnTo>
+                    <a:pt x="3551028" y="676783"/>
+                  </a:lnTo>
+                  <a:lnTo>
+                    <a:pt x="3481400" y="701070"/>
+                  </a:lnTo>
+                  <a:lnTo>
+                    <a:pt x="3411772" y="725372"/>
+                  </a:lnTo>
+                  <a:lnTo>
+                    <a:pt x="3342144" y="749693"/>
+                  </a:lnTo>
+                  <a:lnTo>
+                    <a:pt x="3272516" y="774035"/>
+                  </a:lnTo>
+                  <a:lnTo>
+                    <a:pt x="3202888" y="798399"/>
+                  </a:lnTo>
+                  <a:lnTo>
+                    <a:pt x="3133260" y="822788"/>
+                  </a:lnTo>
+                  <a:lnTo>
+                    <a:pt x="3063632" y="847205"/>
+                  </a:lnTo>
+                  <a:lnTo>
+                    <a:pt x="2994004" y="871653"/>
+                  </a:lnTo>
+                  <a:lnTo>
+                    <a:pt x="2924376" y="896136"/>
+                  </a:lnTo>
+                  <a:lnTo>
+                    <a:pt x="2854748" y="920659"/>
+                  </a:lnTo>
+                  <a:lnTo>
+                    <a:pt x="2785120" y="945226"/>
+                  </a:lnTo>
+                  <a:lnTo>
+                    <a:pt x="2715492" y="969842"/>
+                  </a:lnTo>
+                  <a:lnTo>
+                    <a:pt x="2645864" y="994514"/>
+                  </a:lnTo>
+                  <a:lnTo>
+                    <a:pt x="2576236" y="1019248"/>
+                  </a:lnTo>
+                  <a:lnTo>
+                    <a:pt x="2506608" y="1044052"/>
+                  </a:lnTo>
+                  <a:lnTo>
+                    <a:pt x="2436980" y="1068934"/>
+                  </a:lnTo>
+                  <a:lnTo>
+                    <a:pt x="2367352" y="1093903"/>
+                  </a:lnTo>
+                  <a:lnTo>
+                    <a:pt x="2297724" y="1118967"/>
+                  </a:lnTo>
+                  <a:lnTo>
+                    <a:pt x="2228096" y="1144135"/>
+                  </a:lnTo>
+                  <a:lnTo>
+                    <a:pt x="2158468" y="1169416"/>
+                  </a:lnTo>
+                  <a:lnTo>
+                    <a:pt x="2088840" y="1194818"/>
+                  </a:lnTo>
+                  <a:lnTo>
+                    <a:pt x="2019212" y="1220348"/>
+                  </a:lnTo>
+                  <a:lnTo>
+                    <a:pt x="1949584" y="1246009"/>
+                  </a:lnTo>
+                  <a:lnTo>
+                    <a:pt x="1879956" y="1271806"/>
+                  </a:lnTo>
+                  <a:lnTo>
+                    <a:pt x="1810328" y="1297738"/>
+                  </a:lnTo>
+                  <a:lnTo>
+                    <a:pt x="1740700" y="1323804"/>
+                  </a:lnTo>
+                  <a:lnTo>
+                    <a:pt x="1671072" y="1349999"/>
+                  </a:lnTo>
+                  <a:lnTo>
+                    <a:pt x="1601444" y="1376317"/>
+                  </a:lnTo>
+                  <a:lnTo>
+                    <a:pt x="1531816" y="1402750"/>
+                  </a:lnTo>
+                  <a:lnTo>
+                    <a:pt x="1462188" y="1429290"/>
+                  </a:lnTo>
+                  <a:lnTo>
+                    <a:pt x="1392560" y="1455929"/>
+                  </a:lnTo>
+                  <a:lnTo>
+                    <a:pt x="1322932" y="1482657"/>
+                  </a:lnTo>
+                  <a:lnTo>
+                    <a:pt x="1253304" y="1509465"/>
+                  </a:lnTo>
+                  <a:lnTo>
+                    <a:pt x="1183676" y="1536346"/>
+                  </a:lnTo>
+                  <a:lnTo>
+                    <a:pt x="1114048" y="1563292"/>
+                  </a:lnTo>
+                  <a:lnTo>
+                    <a:pt x="1044420" y="1590295"/>
+                  </a:lnTo>
+                  <a:lnTo>
+                    <a:pt x="974792" y="1617349"/>
+                  </a:lnTo>
+                  <a:lnTo>
+                    <a:pt x="905164" y="1644449"/>
+                  </a:lnTo>
+                  <a:lnTo>
+                    <a:pt x="835536" y="1671590"/>
+                  </a:lnTo>
+                  <a:lnTo>
+                    <a:pt x="765908" y="1698768"/>
+                  </a:lnTo>
+                  <a:lnTo>
+                    <a:pt x="696280" y="1725977"/>
+                  </a:lnTo>
+                  <a:lnTo>
+                    <a:pt x="626652" y="1753216"/>
+                  </a:lnTo>
+                  <a:lnTo>
+                    <a:pt x="557024" y="1780481"/>
+                  </a:lnTo>
+                  <a:lnTo>
+                    <a:pt x="487396" y="1807769"/>
+                  </a:lnTo>
+                  <a:lnTo>
+                    <a:pt x="417768" y="1835078"/>
+                  </a:lnTo>
+                  <a:lnTo>
+                    <a:pt x="348140" y="1862405"/>
+                  </a:lnTo>
+                  <a:lnTo>
+                    <a:pt x="278512" y="1889750"/>
+                  </a:lnTo>
+                  <a:lnTo>
+                    <a:pt x="208884" y="1917111"/>
+                  </a:lnTo>
+                  <a:lnTo>
+                    <a:pt x="139256" y="1944485"/>
+                  </a:lnTo>
+                  <a:lnTo>
+                    <a:pt x="69628" y="1971872"/>
+                  </a:lnTo>
+                  <a:lnTo>
+                    <a:pt x="0" y="1999271"/>
+                  </a:lnTo>
+                </a:path>
+              </a:pathLst>
+            </a:custGeom>
+          </p:spPr>
+          <p:txBody>
+            <a:bodyPr/>
+            <a:lstStyle/>
+            <a:p/>
+          </p:txBody>
+        </p:sp>
+        <p:sp>
+          <p:nvSpPr>
+            <p:cNvPr id="969" name="pl969"/>
+            <p:cNvSpPr/>
+            <p:nvPr/>
+          </p:nvSpPr>
+          <p:spPr>
+            <a:xfrm>
+              <a:off x="1985667" y="2797287"/>
+              <a:ext cx="5500613" cy="2039628"/>
+            </a:xfrm>
+            <a:custGeom>
+              <a:avLst/>
+              <a:pathLst>
+                <a:path w="5500613" h="2039628">
+                  <a:moveTo>
+                    <a:pt x="0" y="2039628"/>
+                  </a:moveTo>
+                  <a:lnTo>
+                    <a:pt x="69628" y="2013810"/>
+                  </a:lnTo>
+                  <a:lnTo>
+                    <a:pt x="139256" y="1987992"/>
+                  </a:lnTo>
+                  <a:lnTo>
+                    <a:pt x="208884" y="1962174"/>
+                  </a:lnTo>
+                  <a:lnTo>
+                    <a:pt x="278512" y="1936356"/>
+                  </a:lnTo>
+                  <a:lnTo>
+                    <a:pt x="348140" y="1910538"/>
+                  </a:lnTo>
+                  <a:lnTo>
+                    <a:pt x="417768" y="1884720"/>
+                  </a:lnTo>
+                  <a:lnTo>
+                    <a:pt x="487396" y="1858902"/>
+                  </a:lnTo>
+                  <a:lnTo>
+                    <a:pt x="557024" y="1833084"/>
+                  </a:lnTo>
+                  <a:lnTo>
+                    <a:pt x="626652" y="1807265"/>
+                  </a:lnTo>
+                  <a:lnTo>
+                    <a:pt x="696280" y="1781447"/>
+                  </a:lnTo>
+                  <a:lnTo>
+                    <a:pt x="765908" y="1755629"/>
+                  </a:lnTo>
+                  <a:lnTo>
+                    <a:pt x="835536" y="1729811"/>
+                  </a:lnTo>
+                  <a:lnTo>
+                    <a:pt x="905164" y="1703993"/>
+                  </a:lnTo>
+                  <a:lnTo>
+                    <a:pt x="974792" y="1678175"/>
+                  </a:lnTo>
+                  <a:lnTo>
+                    <a:pt x="1044420" y="1652357"/>
+                  </a:lnTo>
+                  <a:lnTo>
+                    <a:pt x="1114048" y="1626539"/>
+                  </a:lnTo>
+                  <a:lnTo>
+                    <a:pt x="1183676" y="1600721"/>
+                  </a:lnTo>
+                  <a:lnTo>
+                    <a:pt x="1253304" y="1574903"/>
+                  </a:lnTo>
+                  <a:lnTo>
+                    <a:pt x="1322932" y="1549085"/>
+                  </a:lnTo>
+                  <a:lnTo>
+                    <a:pt x="1392560" y="1523267"/>
+                  </a:lnTo>
+                  <a:lnTo>
+                    <a:pt x="1462188" y="1497448"/>
+                  </a:lnTo>
+                  <a:lnTo>
+                    <a:pt x="1531816" y="1471630"/>
+                  </a:lnTo>
+                  <a:lnTo>
+                    <a:pt x="1601444" y="1445812"/>
+                  </a:lnTo>
+                  <a:lnTo>
+                    <a:pt x="1671072" y="1419994"/>
+                  </a:lnTo>
+                  <a:lnTo>
+                    <a:pt x="1740700" y="1394176"/>
+                  </a:lnTo>
+                  <a:lnTo>
+                    <a:pt x="1810328" y="1368358"/>
+                  </a:lnTo>
+                  <a:lnTo>
+                    <a:pt x="1879956" y="1342540"/>
+                  </a:lnTo>
+                  <a:lnTo>
+                    <a:pt x="1949584" y="1316722"/>
+                  </a:lnTo>
+                  <a:lnTo>
+                    <a:pt x="2019212" y="1290904"/>
+                  </a:lnTo>
+                  <a:lnTo>
+                    <a:pt x="2088840" y="1265086"/>
+                  </a:lnTo>
+                  <a:lnTo>
+                    <a:pt x="2158468" y="1239268"/>
+                  </a:lnTo>
+                  <a:lnTo>
+                    <a:pt x="2228096" y="1213450"/>
+                  </a:lnTo>
+                  <a:lnTo>
+                    <a:pt x="2297724" y="1187631"/>
+                  </a:lnTo>
+                  <a:lnTo>
+                    <a:pt x="2367352" y="1161813"/>
+                  </a:lnTo>
+                  <a:lnTo>
+                    <a:pt x="2436980" y="1135995"/>
+                  </a:lnTo>
+                  <a:lnTo>
+                    <a:pt x="2506608" y="1110177"/>
+                  </a:lnTo>
+                  <a:lnTo>
+                    <a:pt x="2576236" y="1084359"/>
+                  </a:lnTo>
+                  <a:lnTo>
+                    <a:pt x="2645864" y="1058541"/>
+                  </a:lnTo>
+                  <a:lnTo>
+                    <a:pt x="2715492" y="1032723"/>
+                  </a:lnTo>
+                  <a:lnTo>
+                    <a:pt x="2785120" y="1006905"/>
+                  </a:lnTo>
+                  <a:lnTo>
+                    <a:pt x="2854748" y="981087"/>
+                  </a:lnTo>
+                  <a:lnTo>
+                    <a:pt x="2924376" y="955269"/>
+                  </a:lnTo>
+                  <a:lnTo>
+                    <a:pt x="2994004" y="929451"/>
+                  </a:lnTo>
+                  <a:lnTo>
+                    <a:pt x="3063632" y="903632"/>
+                  </a:lnTo>
+                  <a:lnTo>
+                    <a:pt x="3133260" y="877814"/>
+                  </a:lnTo>
+                  <a:lnTo>
+                    <a:pt x="3202888" y="851996"/>
+                  </a:lnTo>
+                  <a:lnTo>
+                    <a:pt x="3272516" y="826178"/>
+                  </a:lnTo>
+                  <a:lnTo>
+                    <a:pt x="3342144" y="800360"/>
+                  </a:lnTo>
+                  <a:lnTo>
+                    <a:pt x="3411772" y="774542"/>
+                  </a:lnTo>
+                  <a:lnTo>
+                    <a:pt x="3481400" y="748724"/>
+                  </a:lnTo>
+                  <a:lnTo>
+                    <a:pt x="3551028" y="722906"/>
+                  </a:lnTo>
+                  <a:lnTo>
+                    <a:pt x="3620656" y="697088"/>
+                  </a:lnTo>
+                  <a:lnTo>
+                    <a:pt x="3690284" y="671270"/>
+                  </a:lnTo>
+                  <a:lnTo>
+                    <a:pt x="3759912" y="645452"/>
+                  </a:lnTo>
+                  <a:lnTo>
+                    <a:pt x="3829540" y="619634"/>
+                  </a:lnTo>
+                  <a:lnTo>
+                    <a:pt x="3899168" y="593815"/>
+                  </a:lnTo>
+                  <a:lnTo>
+                    <a:pt x="3968796" y="567997"/>
+                  </a:lnTo>
+                  <a:lnTo>
+                    <a:pt x="4038424" y="542179"/>
+                  </a:lnTo>
+                  <a:lnTo>
+                    <a:pt x="4108052" y="516361"/>
+                  </a:lnTo>
+                  <a:lnTo>
+                    <a:pt x="4177680" y="490543"/>
+                  </a:lnTo>
+                  <a:lnTo>
+                    <a:pt x="4247308" y="464725"/>
+                  </a:lnTo>
+                  <a:lnTo>
+                    <a:pt x="4316936" y="438907"/>
+                  </a:lnTo>
+                  <a:lnTo>
+                    <a:pt x="4386564" y="413089"/>
+                  </a:lnTo>
+                  <a:lnTo>
+                    <a:pt x="4456192" y="387271"/>
+                  </a:lnTo>
+                  <a:lnTo>
+                    <a:pt x="4525820" y="361453"/>
+                  </a:lnTo>
+                  <a:lnTo>
+                    <a:pt x="4595448" y="335635"/>
+                  </a:lnTo>
+                  <a:lnTo>
+                    <a:pt x="4665077" y="309817"/>
+                  </a:lnTo>
+                  <a:lnTo>
+                    <a:pt x="4734705" y="283998"/>
+                  </a:lnTo>
+                  <a:lnTo>
+                    <a:pt x="4804333" y="258180"/>
+                  </a:lnTo>
+                  <a:lnTo>
+                    <a:pt x="4873961" y="232362"/>
+                  </a:lnTo>
+                  <a:lnTo>
+                    <a:pt x="4943589" y="206544"/>
+                  </a:lnTo>
+                  <a:lnTo>
+                    <a:pt x="5013217" y="180726"/>
+                  </a:lnTo>
+                  <a:lnTo>
+                    <a:pt x="5082845" y="154908"/>
+                  </a:lnTo>
+                  <a:lnTo>
+                    <a:pt x="5152473" y="129090"/>
+                  </a:lnTo>
+                  <a:lnTo>
+                    <a:pt x="5222101" y="103272"/>
+                  </a:lnTo>
+                  <a:lnTo>
+                    <a:pt x="5291729" y="77454"/>
+                  </a:lnTo>
+                  <a:lnTo>
+                    <a:pt x="5361357" y="51636"/>
+                  </a:lnTo>
+                  <a:lnTo>
+                    <a:pt x="5430985" y="25818"/>
+                  </a:lnTo>
+                  <a:lnTo>
+                    <a:pt x="5500613" y="0"/>
+                  </a:lnTo>
+                </a:path>
+              </a:pathLst>
+            </a:custGeom>
+            <a:ln w="27101" cap="flat">
+              <a:solidFill>
+                <a:srgbClr val="999999">
+                  <a:alpha val="100000"/>
+                </a:srgbClr>
+              </a:solidFill>
+              <a:prstDash val="solid"/>
+              <a:round/>
+            </a:ln>
+          </p:spPr>
+          <p:txBody>
+            <a:bodyPr/>
+            <a:lstStyle/>
+            <a:p/>
+          </p:txBody>
+        </p:sp>
+        <p:sp>
+          <p:nvSpPr>
+            <p:cNvPr id="970" name="pg970"/>
+            <p:cNvSpPr/>
+            <p:nvPr/>
+          </p:nvSpPr>
+          <p:spPr>
+            <a:xfrm>
+              <a:off x="2338367" y="2842360"/>
+              <a:ext cx="6278843" cy="1864119"/>
+            </a:xfrm>
+            <a:custGeom>
+              <a:avLst/>
+              <a:pathLst>
+                <a:path w="6278843" h="1864119">
+                  <a:moveTo>
+                    <a:pt x="0" y="1770526"/>
+                  </a:moveTo>
+                  <a:lnTo>
+                    <a:pt x="158461" y="1728804"/>
+                  </a:lnTo>
+                  <a:lnTo>
+                    <a:pt x="316922" y="1687041"/>
+                  </a:lnTo>
+                  <a:lnTo>
+                    <a:pt x="475383" y="1645231"/>
+                  </a:lnTo>
+                  <a:lnTo>
+                    <a:pt x="633844" y="1603365"/>
+                  </a:lnTo>
+                  <a:lnTo>
+                    <a:pt x="792305" y="1561432"/>
+                  </a:lnTo>
+                  <a:lnTo>
+                    <a:pt x="950766" y="1519420"/>
+                  </a:lnTo>
+                  <a:lnTo>
+                    <a:pt x="1109227" y="1477311"/>
+                  </a:lnTo>
+                  <a:lnTo>
+                    <a:pt x="1267688" y="1435087"/>
+                  </a:lnTo>
+                  <a:lnTo>
+                    <a:pt x="1426149" y="1392724"/>
+                  </a:lnTo>
+                  <a:lnTo>
+                    <a:pt x="1584610" y="1350194"/>
+                  </a:lnTo>
+                  <a:lnTo>
+                    <a:pt x="1743071" y="1307465"/>
+                  </a:lnTo>
+                  <a:lnTo>
+                    <a:pt x="1901532" y="1264503"/>
+                  </a:lnTo>
+                  <a:lnTo>
+                    <a:pt x="2059993" y="1221271"/>
+                  </a:lnTo>
+                  <a:lnTo>
+                    <a:pt x="2218454" y="1177739"/>
+                  </a:lnTo>
+                  <a:lnTo>
+                    <a:pt x="2376915" y="1133882"/>
+                  </a:lnTo>
+                  <a:lnTo>
+                    <a:pt x="2535377" y="1089690"/>
+                  </a:lnTo>
+                  <a:lnTo>
+                    <a:pt x="2693838" y="1045166"/>
+                  </a:lnTo>
+                  <a:lnTo>
+                    <a:pt x="2852299" y="1000329"/>
+                  </a:lnTo>
+                  <a:lnTo>
+                    <a:pt x="3010760" y="955207"/>
+                  </a:lnTo>
+                  <a:lnTo>
+                    <a:pt x="3169221" y="909834"/>
+                  </a:lnTo>
+                  <a:lnTo>
+                    <a:pt x="3327682" y="864245"/>
+                  </a:lnTo>
+                  <a:lnTo>
+                    <a:pt x="3486143" y="818475"/>
+                  </a:lnTo>
+                  <a:lnTo>
+                    <a:pt x="3644604" y="772553"/>
+                  </a:lnTo>
+                  <a:lnTo>
+                    <a:pt x="3803065" y="726505"/>
+                  </a:lnTo>
+                  <a:lnTo>
+                    <a:pt x="3961526" y="680352"/>
+                  </a:lnTo>
+                  <a:lnTo>
+                    <a:pt x="4119987" y="634112"/>
+                  </a:lnTo>
+                  <a:lnTo>
+                    <a:pt x="4278448" y="587799"/>
+                  </a:lnTo>
+                  <a:lnTo>
+                    <a:pt x="4436909" y="541425"/>
+                  </a:lnTo>
+                  <a:lnTo>
+                    <a:pt x="4595370" y="495000"/>
+                  </a:lnTo>
+                  <a:lnTo>
+                    <a:pt x="4753831" y="448531"/>
+                  </a:lnTo>
+                  <a:lnTo>
+                    <a:pt x="4912293" y="402025"/>
+                  </a:lnTo>
+                  <a:lnTo>
+                    <a:pt x="5070754" y="355488"/>
+                  </a:lnTo>
+                  <a:lnTo>
+                    <a:pt x="5229215" y="308922"/>
+                  </a:lnTo>
+                  <a:lnTo>
+                    <a:pt x="5387676" y="262333"/>
+                  </a:lnTo>
+                  <a:lnTo>
+                    <a:pt x="5546137" y="215724"/>
+                  </a:lnTo>
+                  <a:lnTo>
+                    <a:pt x="5704598" y="169096"/>
+                  </a:lnTo>
+                  <a:lnTo>
+                    <a:pt x="5863059" y="122452"/>
+                  </a:lnTo>
+                  <a:lnTo>
+                    <a:pt x="6021520" y="75794"/>
+                  </a:lnTo>
+                  <a:lnTo>
+                    <a:pt x="6179981" y="29124"/>
+                  </a:lnTo>
+                  <a:lnTo>
+                    <a:pt x="6278843" y="0"/>
+                  </a:lnTo>
+                  <a:lnTo>
+                    <a:pt x="6278843" y="139437"/>
+                  </a:lnTo>
+                  <a:lnTo>
+                    <a:pt x="6179981" y="165346"/>
+                  </a:lnTo>
+                  <a:lnTo>
+                    <a:pt x="6021520" y="206885"/>
+                  </a:lnTo>
+                  <a:lnTo>
+                    <a:pt x="5863059" y="248437"/>
+                  </a:lnTo>
+                  <a:lnTo>
+                    <a:pt x="5704598" y="290003"/>
+                  </a:lnTo>
+                  <a:lnTo>
+                    <a:pt x="5546137" y="331584"/>
+                  </a:lnTo>
+                  <a:lnTo>
+                    <a:pt x="5387676" y="373184"/>
+                  </a:lnTo>
+                  <a:lnTo>
+                    <a:pt x="5229215" y="414805"/>
+                  </a:lnTo>
+                  <a:lnTo>
+                    <a:pt x="5070754" y="456449"/>
+                  </a:lnTo>
+                  <a:lnTo>
+                    <a:pt x="4912293" y="498121"/>
+                  </a:lnTo>
+                  <a:lnTo>
+                    <a:pt x="4753831" y="539825"/>
+                  </a:lnTo>
+                  <a:lnTo>
+                    <a:pt x="4595370" y="581566"/>
+                  </a:lnTo>
+                  <a:lnTo>
+                    <a:pt x="4436909" y="623350"/>
+                  </a:lnTo>
+                  <a:lnTo>
+                    <a:pt x="4278448" y="665186"/>
+                  </a:lnTo>
+                  <a:lnTo>
+                    <a:pt x="4119987" y="707083"/>
+                  </a:lnTo>
+                  <a:lnTo>
+                    <a:pt x="3961526" y="749052"/>
+                  </a:lnTo>
+                  <a:lnTo>
+                    <a:pt x="3803065" y="791109"/>
+                  </a:lnTo>
+                  <a:lnTo>
+                    <a:pt x="3644604" y="833270"/>
+                  </a:lnTo>
+                  <a:lnTo>
+                    <a:pt x="3486143" y="875558"/>
+                  </a:lnTo>
+                  <a:lnTo>
+                    <a:pt x="3327682" y="917998"/>
+                  </a:lnTo>
+                  <a:lnTo>
+                    <a:pt x="3169221" y="960619"/>
+                  </a:lnTo>
+                  <a:lnTo>
+                    <a:pt x="3010760" y="1003455"/>
+                  </a:lnTo>
+                  <a:lnTo>
+                    <a:pt x="2852299" y="1046543"/>
+                  </a:lnTo>
+                  <a:lnTo>
+                    <a:pt x="2693838" y="1089915"/>
+                  </a:lnTo>
+                  <a:lnTo>
+                    <a:pt x="2535377" y="1133601"/>
+                  </a:lnTo>
+                  <a:lnTo>
+                    <a:pt x="2376915" y="1177618"/>
+                  </a:lnTo>
+                  <a:lnTo>
+                    <a:pt x="2218454" y="1221971"/>
+                  </a:lnTo>
+                  <a:lnTo>
+                    <a:pt x="2059993" y="1266649"/>
+                  </a:lnTo>
+                  <a:lnTo>
+                    <a:pt x="1901532" y="1311627"/>
+                  </a:lnTo>
+                  <a:lnTo>
+                    <a:pt x="1743071" y="1356874"/>
+                  </a:lnTo>
+                  <a:lnTo>
+                    <a:pt x="1584610" y="1402355"/>
+                  </a:lnTo>
+                  <a:lnTo>
+                    <a:pt x="1426149" y="1448035"/>
+                  </a:lnTo>
+                  <a:lnTo>
+                    <a:pt x="1267688" y="1493881"/>
+                  </a:lnTo>
+                  <a:lnTo>
+                    <a:pt x="1109227" y="1539867"/>
+                  </a:lnTo>
+                  <a:lnTo>
+                    <a:pt x="950766" y="1585968"/>
+                  </a:lnTo>
+                  <a:lnTo>
+                    <a:pt x="792305" y="1632165"/>
+                  </a:lnTo>
+                  <a:lnTo>
+                    <a:pt x="633844" y="1678441"/>
+                  </a:lnTo>
+                  <a:lnTo>
+                    <a:pt x="475383" y="1724785"/>
+                  </a:lnTo>
+                  <a:lnTo>
+                    <a:pt x="316922" y="1771185"/>
+                  </a:lnTo>
+                  <a:lnTo>
+                    <a:pt x="158461" y="1817632"/>
+                  </a:lnTo>
+                  <a:lnTo>
+                    <a:pt x="0" y="1864119"/>
+                  </a:lnTo>
+                  <a:close/>
+                </a:path>
+              </a:pathLst>
+            </a:custGeom>
+            <a:solidFill>
+              <a:srgbClr val="E31A1C">
+                <a:alpha val="14901"/>
+              </a:srgbClr>
+            </a:solidFill>
+          </p:spPr>
+          <p:txBody>
+            <a:bodyPr/>
+            <a:lstStyle/>
+            <a:p/>
+          </p:txBody>
+        </p:sp>
+        <p:sp>
+          <p:nvSpPr>
+            <p:cNvPr id="971" name="pl971"/>
+            <p:cNvSpPr/>
+            <p:nvPr/>
+          </p:nvSpPr>
+          <p:spPr>
+            <a:xfrm>
+              <a:off x="2338367" y="2842360"/>
+              <a:ext cx="6278843" cy="1770526"/>
+            </a:xfrm>
+            <a:custGeom>
+              <a:avLst/>
+              <a:pathLst>
+                <a:path w="6278843" h="1770526">
+                  <a:moveTo>
+                    <a:pt x="0" y="1770526"/>
+                  </a:moveTo>
+                  <a:lnTo>
+                    <a:pt x="158461" y="1728804"/>
+                  </a:lnTo>
+                  <a:lnTo>
+                    <a:pt x="316922" y="1687041"/>
+                  </a:lnTo>
+                  <a:lnTo>
+                    <a:pt x="475383" y="1645231"/>
+                  </a:lnTo>
+                  <a:lnTo>
+                    <a:pt x="633844" y="1603365"/>
+                  </a:lnTo>
+                  <a:lnTo>
+                    <a:pt x="792305" y="1561432"/>
+                  </a:lnTo>
+                  <a:lnTo>
+                    <a:pt x="950766" y="1519420"/>
+                  </a:lnTo>
+                  <a:lnTo>
+                    <a:pt x="1109227" y="1477311"/>
+                  </a:lnTo>
+                  <a:lnTo>
+                    <a:pt x="1267688" y="1435087"/>
+                  </a:lnTo>
+                  <a:lnTo>
+                    <a:pt x="1426149" y="1392724"/>
+                  </a:lnTo>
+                  <a:lnTo>
+                    <a:pt x="1584610" y="1350194"/>
+                  </a:lnTo>
+                  <a:lnTo>
+                    <a:pt x="1743071" y="1307465"/>
+                  </a:lnTo>
+                  <a:lnTo>
+                    <a:pt x="1901532" y="1264503"/>
+                  </a:lnTo>
+                  <a:lnTo>
+                    <a:pt x="2059993" y="1221271"/>
+                  </a:lnTo>
+                  <a:lnTo>
+                    <a:pt x="2218454" y="1177739"/>
+                  </a:lnTo>
+                  <a:lnTo>
+                    <a:pt x="2376915" y="1133882"/>
+                  </a:lnTo>
+                  <a:lnTo>
+                    <a:pt x="2535377" y="1089690"/>
+                  </a:lnTo>
+                  <a:lnTo>
+                    <a:pt x="2693838" y="1045166"/>
+                  </a:lnTo>
+                  <a:lnTo>
+                    <a:pt x="2852299" y="1000329"/>
+                  </a:lnTo>
+                  <a:lnTo>
+                    <a:pt x="3010760" y="955207"/>
+                  </a:lnTo>
+                  <a:lnTo>
+                    <a:pt x="3169221" y="909834"/>
+                  </a:lnTo>
+                  <a:lnTo>
+                    <a:pt x="3327682" y="864245"/>
+                  </a:lnTo>
+                  <a:lnTo>
+                    <a:pt x="3486143" y="818475"/>
+                  </a:lnTo>
+                  <a:lnTo>
+                    <a:pt x="3644604" y="772553"/>
+                  </a:lnTo>
+                  <a:lnTo>
+                    <a:pt x="3803065" y="726505"/>
+                  </a:lnTo>
+                  <a:lnTo>
+                    <a:pt x="3961526" y="680352"/>
+                  </a:lnTo>
+                  <a:lnTo>
+                    <a:pt x="4119987" y="634112"/>
+                  </a:lnTo>
+                  <a:lnTo>
+                    <a:pt x="4278448" y="587799"/>
+                  </a:lnTo>
+                  <a:lnTo>
+                    <a:pt x="4436909" y="541425"/>
+                  </a:lnTo>
+                  <a:lnTo>
+                    <a:pt x="4595370" y="495000"/>
+                  </a:lnTo>
+                  <a:lnTo>
+                    <a:pt x="4753831" y="448531"/>
+                  </a:lnTo>
+                  <a:lnTo>
+                    <a:pt x="4912293" y="402025"/>
+                  </a:lnTo>
+                  <a:lnTo>
+                    <a:pt x="5070754" y="355488"/>
+                  </a:lnTo>
+                  <a:lnTo>
+                    <a:pt x="5229215" y="308922"/>
+                  </a:lnTo>
+                  <a:lnTo>
+                    <a:pt x="5387676" y="262333"/>
+                  </a:lnTo>
+                  <a:lnTo>
+                    <a:pt x="5546137" y="215724"/>
+                  </a:lnTo>
+                  <a:lnTo>
+                    <a:pt x="5704598" y="169096"/>
+                  </a:lnTo>
+                  <a:lnTo>
+                    <a:pt x="5863059" y="122452"/>
+                  </a:lnTo>
+                  <a:lnTo>
+                    <a:pt x="6021520" y="75794"/>
+                  </a:lnTo>
+                  <a:lnTo>
+                    <a:pt x="6179981" y="29124"/>
+                  </a:lnTo>
+                  <a:lnTo>
+                    <a:pt x="6278843" y="0"/>
+                  </a:lnTo>
+                </a:path>
+              </a:pathLst>
+            </a:custGeom>
+          </p:spPr>
+          <p:txBody>
+            <a:bodyPr/>
+            <a:lstStyle/>
+            <a:p/>
+          </p:txBody>
+        </p:sp>
+        <p:sp>
+          <p:nvSpPr>
+            <p:cNvPr id="972" name="pl972"/>
+            <p:cNvSpPr/>
+            <p:nvPr/>
+          </p:nvSpPr>
+          <p:spPr>
+            <a:xfrm>
+              <a:off x="2338367" y="2981797"/>
+              <a:ext cx="6278843" cy="1724681"/>
+            </a:xfrm>
+            <a:custGeom>
+              <a:avLst/>
+              <a:pathLst>
+                <a:path w="6278843" h="1724681">
+                  <a:moveTo>
+                    <a:pt x="6278843" y="0"/>
+                  </a:moveTo>
+                  <a:lnTo>
+                    <a:pt x="6179981" y="25908"/>
+                  </a:lnTo>
+                  <a:lnTo>
+                    <a:pt x="6021520" y="67448"/>
+                  </a:lnTo>
+                  <a:lnTo>
+                    <a:pt x="5863059" y="108999"/>
+                  </a:lnTo>
+                  <a:lnTo>
+                    <a:pt x="5704598" y="150565"/>
+                  </a:lnTo>
+                  <a:lnTo>
+                    <a:pt x="5546137" y="192147"/>
+                  </a:lnTo>
+                  <a:lnTo>
+                    <a:pt x="5387676" y="233747"/>
+                  </a:lnTo>
+                  <a:lnTo>
+                    <a:pt x="5229215" y="275368"/>
+                  </a:lnTo>
+                  <a:lnTo>
+                    <a:pt x="5070754" y="317012"/>
+                  </a:lnTo>
+                  <a:lnTo>
+                    <a:pt x="4912293" y="358684"/>
+                  </a:lnTo>
+                  <a:lnTo>
+                    <a:pt x="4753831" y="400388"/>
+                  </a:lnTo>
+                  <a:lnTo>
+                    <a:pt x="4595370" y="442128"/>
+                  </a:lnTo>
+                  <a:lnTo>
+                    <a:pt x="4436909" y="483913"/>
+                  </a:lnTo>
+                  <a:lnTo>
+                    <a:pt x="4278448" y="525749"/>
+                  </a:lnTo>
+                  <a:lnTo>
+                    <a:pt x="4119987" y="567645"/>
+                  </a:lnTo>
+                  <a:lnTo>
+                    <a:pt x="3961526" y="609615"/>
+                  </a:lnTo>
+                  <a:lnTo>
+                    <a:pt x="3803065" y="651671"/>
+                  </a:lnTo>
+                  <a:lnTo>
+                    <a:pt x="3644604" y="693833"/>
+                  </a:lnTo>
+                  <a:lnTo>
+                    <a:pt x="3486143" y="736121"/>
+                  </a:lnTo>
+                  <a:lnTo>
+                    <a:pt x="3327682" y="778560"/>
+                  </a:lnTo>
+                  <a:lnTo>
+                    <a:pt x="3169221" y="821181"/>
+                  </a:lnTo>
+                  <a:lnTo>
+                    <a:pt x="3010760" y="864018"/>
+                  </a:lnTo>
+                  <a:lnTo>
+                    <a:pt x="2852299" y="907105"/>
+                  </a:lnTo>
+                  <a:lnTo>
+                    <a:pt x="2693838" y="950478"/>
+                  </a:lnTo>
+                  <a:lnTo>
+                    <a:pt x="2535377" y="994163"/>
+                  </a:lnTo>
+                  <a:lnTo>
+                    <a:pt x="2376915" y="1038181"/>
+                  </a:lnTo>
+                  <a:lnTo>
+                    <a:pt x="2218454" y="1082534"/>
+                  </a:lnTo>
+                  <a:lnTo>
+                    <a:pt x="2059993" y="1127211"/>
+                  </a:lnTo>
+                  <a:lnTo>
+                    <a:pt x="1901532" y="1172189"/>
+                  </a:lnTo>
+                  <a:lnTo>
+                    <a:pt x="1743071" y="1217437"/>
+                  </a:lnTo>
+                  <a:lnTo>
+                    <a:pt x="1584610" y="1262918"/>
+                  </a:lnTo>
+                  <a:lnTo>
+                    <a:pt x="1426149" y="1308597"/>
+                  </a:lnTo>
+                  <a:lnTo>
+                    <a:pt x="1267688" y="1354444"/>
+                  </a:lnTo>
+                  <a:lnTo>
+                    <a:pt x="1109227" y="1400429"/>
+                  </a:lnTo>
+                  <a:lnTo>
+                    <a:pt x="950766" y="1446530"/>
+                  </a:lnTo>
+                  <a:lnTo>
+                    <a:pt x="792305" y="1492727"/>
+                  </a:lnTo>
+                  <a:lnTo>
+                    <a:pt x="633844" y="1539004"/>
+                  </a:lnTo>
+                  <a:lnTo>
+                    <a:pt x="475383" y="1585347"/>
+                  </a:lnTo>
+                  <a:lnTo>
+                    <a:pt x="316922" y="1631747"/>
+                  </a:lnTo>
+                  <a:lnTo>
+                    <a:pt x="158461" y="1678194"/>
+                  </a:lnTo>
+                  <a:lnTo>
+                    <a:pt x="0" y="1724681"/>
+                  </a:lnTo>
+                </a:path>
+              </a:pathLst>
+            </a:custGeom>
+          </p:spPr>
+          <p:txBody>
+            <a:bodyPr/>
+            <a:lstStyle/>
+            <a:p/>
+          </p:txBody>
+        </p:sp>
+        <p:sp>
+          <p:nvSpPr>
+            <p:cNvPr id="973" name="pl973"/>
+            <p:cNvSpPr/>
+            <p:nvPr/>
+          </p:nvSpPr>
+          <p:spPr>
+            <a:xfrm>
+              <a:off x="2338367" y="2912078"/>
+              <a:ext cx="6278843" cy="1747604"/>
+            </a:xfrm>
+            <a:custGeom>
+              <a:avLst/>
+              <a:pathLst>
+                <a:path w="6278843" h="1747604">
+                  <a:moveTo>
+                    <a:pt x="0" y="1747604"/>
+                  </a:moveTo>
+                  <a:lnTo>
+                    <a:pt x="158461" y="1703499"/>
+                  </a:lnTo>
+                  <a:lnTo>
+                    <a:pt x="316922" y="1659394"/>
+                  </a:lnTo>
+                  <a:lnTo>
+                    <a:pt x="475383" y="1615289"/>
+                  </a:lnTo>
+                  <a:lnTo>
+                    <a:pt x="633844" y="1571185"/>
+                  </a:lnTo>
+                  <a:lnTo>
+                    <a:pt x="792305" y="1527080"/>
+                  </a:lnTo>
+                  <a:lnTo>
+                    <a:pt x="950766" y="1482975"/>
+                  </a:lnTo>
+                  <a:lnTo>
+                    <a:pt x="1109227" y="1438870"/>
+                  </a:lnTo>
+                  <a:lnTo>
+                    <a:pt x="1267688" y="1394765"/>
+                  </a:lnTo>
+                  <a:lnTo>
+                    <a:pt x="1426149" y="1350661"/>
+                  </a:lnTo>
+                  <a:lnTo>
+                    <a:pt x="1584610" y="1306556"/>
+                  </a:lnTo>
+                  <a:lnTo>
+                    <a:pt x="1743071" y="1262451"/>
+                  </a:lnTo>
+                  <a:lnTo>
+                    <a:pt x="1901532" y="1218346"/>
+                  </a:lnTo>
+                  <a:lnTo>
+                    <a:pt x="2059993" y="1174241"/>
+                  </a:lnTo>
+                  <a:lnTo>
+                    <a:pt x="2218454" y="1130136"/>
+                  </a:lnTo>
+                  <a:lnTo>
+                    <a:pt x="2376915" y="1086032"/>
+                  </a:lnTo>
+                  <a:lnTo>
+                    <a:pt x="2535377" y="1041927"/>
+                  </a:lnTo>
+                  <a:lnTo>
+                    <a:pt x="2693838" y="997822"/>
+                  </a:lnTo>
+                  <a:lnTo>
+                    <a:pt x="2852299" y="953717"/>
+                  </a:lnTo>
+                  <a:lnTo>
+                    <a:pt x="3010760" y="909612"/>
+                  </a:lnTo>
+                  <a:lnTo>
+                    <a:pt x="3169221" y="865508"/>
+                  </a:lnTo>
+                  <a:lnTo>
+                    <a:pt x="3327682" y="821403"/>
+                  </a:lnTo>
+                  <a:lnTo>
+                    <a:pt x="3486143" y="777298"/>
+                  </a:lnTo>
+                  <a:lnTo>
+                    <a:pt x="3644604" y="733193"/>
+                  </a:lnTo>
+                  <a:lnTo>
+                    <a:pt x="3803065" y="689088"/>
+                  </a:lnTo>
+                  <a:lnTo>
+                    <a:pt x="3961526" y="644983"/>
+                  </a:lnTo>
+                  <a:lnTo>
+                    <a:pt x="4119987" y="600879"/>
+                  </a:lnTo>
+                  <a:lnTo>
+                    <a:pt x="4278448" y="556774"/>
+                  </a:lnTo>
+                  <a:lnTo>
+                    <a:pt x="4436909" y="512669"/>
+                  </a:lnTo>
+                  <a:lnTo>
+                    <a:pt x="4595370" y="468564"/>
+                  </a:lnTo>
+                  <a:lnTo>
+                    <a:pt x="4753831" y="424459"/>
+                  </a:lnTo>
+                  <a:lnTo>
+                    <a:pt x="4912293" y="380355"/>
+                  </a:lnTo>
+                  <a:lnTo>
+                    <a:pt x="5070754" y="336250"/>
+                  </a:lnTo>
+                  <a:lnTo>
+                    <a:pt x="5229215" y="292145"/>
+                  </a:lnTo>
+                  <a:lnTo>
+                    <a:pt x="5387676" y="248040"/>
+                  </a:lnTo>
+                  <a:lnTo>
+                    <a:pt x="5546137" y="203935"/>
+                  </a:lnTo>
+                  <a:lnTo>
+                    <a:pt x="5704598" y="159830"/>
+                  </a:lnTo>
+                  <a:lnTo>
+                    <a:pt x="5863059" y="115726"/>
+                  </a:lnTo>
+                  <a:lnTo>
+                    <a:pt x="6021520" y="71621"/>
+                  </a:lnTo>
+                  <a:lnTo>
+                    <a:pt x="6179981" y="27516"/>
+                  </a:lnTo>
+                  <a:lnTo>
+                    <a:pt x="6278843" y="0"/>
+                  </a:lnTo>
+                </a:path>
+              </a:pathLst>
+            </a:custGeom>
+            <a:ln w="27101" cap="flat">
+              <a:solidFill>
+                <a:srgbClr val="E31A1C">
+                  <a:alpha val="100000"/>
+                </a:srgbClr>
+              </a:solidFill>
+              <a:prstDash val="solid"/>
+              <a:round/>
+            </a:ln>
+          </p:spPr>
+          <p:txBody>
+            <a:bodyPr/>
+            <a:lstStyle/>
+            <a:p/>
+          </p:txBody>
+        </p:sp>
+        <p:sp>
+          <p:nvSpPr>
+            <p:cNvPr id="974" name="tx974"/>
             <p:cNvSpPr/>
             <p:nvPr/>
           </p:nvSpPr>
@@ -36130,7 +38175,7 @@
         </p:sp>
         <p:sp>
           <p:nvSpPr>
-            <p:cNvPr id="967" name="tx967"/>
+            <p:cNvPr id="975" name="tx975"/>
             <p:cNvSpPr/>
             <p:nvPr/>
           </p:nvSpPr>
@@ -36176,7 +38221,7 @@
         </p:sp>
         <p:sp>
           <p:nvSpPr>
-            <p:cNvPr id="968" name="tx968"/>
+            <p:cNvPr id="976" name="tx976"/>
             <p:cNvSpPr/>
             <p:nvPr/>
           </p:nvSpPr>
@@ -36222,7 +38267,7 @@
         </p:sp>
         <p:sp>
           <p:nvSpPr>
-            <p:cNvPr id="969" name="tx969"/>
+            <p:cNvPr id="977" name="tx977"/>
             <p:cNvSpPr/>
             <p:nvPr/>
           </p:nvSpPr>
@@ -36268,7 +38313,7 @@
         </p:sp>
         <p:sp>
           <p:nvSpPr>
-            <p:cNvPr id="970" name="tx970"/>
+            <p:cNvPr id="978" name="tx978"/>
             <p:cNvSpPr/>
             <p:nvPr/>
           </p:nvSpPr>
@@ -36314,7 +38359,7 @@
         </p:sp>
         <p:sp>
           <p:nvSpPr>
-            <p:cNvPr id="971" name="tx971"/>
+            <p:cNvPr id="979" name="tx979"/>
             <p:cNvSpPr/>
             <p:nvPr/>
           </p:nvSpPr>
@@ -36360,7 +38405,7 @@
         </p:sp>
         <p:sp>
           <p:nvSpPr>
-            <p:cNvPr id="972" name="tx972"/>
+            <p:cNvPr id="980" name="tx980"/>
             <p:cNvSpPr/>
             <p:nvPr/>
           </p:nvSpPr>
@@ -36406,7 +38451,7 @@
         </p:sp>
         <p:sp>
           <p:nvSpPr>
-            <p:cNvPr id="973" name="tx973"/>
+            <p:cNvPr id="981" name="tx981"/>
             <p:cNvSpPr/>
             <p:nvPr/>
           </p:nvSpPr>
@@ -36452,7 +38497,7 @@
         </p:sp>
         <p:sp>
           <p:nvSpPr>
-            <p:cNvPr id="974" name="tx974"/>
+            <p:cNvPr id="982" name="tx982"/>
             <p:cNvSpPr/>
             <p:nvPr/>
           </p:nvSpPr>
@@ -36498,7 +38543,7 @@
         </p:sp>
         <p:sp>
           <p:nvSpPr>
-            <p:cNvPr id="975" name="tx975"/>
+            <p:cNvPr id="983" name="tx983"/>
             <p:cNvSpPr/>
             <p:nvPr/>
           </p:nvSpPr>
@@ -36544,7 +38589,7 @@
         </p:sp>
         <p:sp>
           <p:nvSpPr>
-            <p:cNvPr id="976" name="tx976"/>
+            <p:cNvPr id="984" name="tx984"/>
             <p:cNvSpPr/>
             <p:nvPr/>
           </p:nvSpPr>
@@ -36590,7 +38635,7 @@
         </p:sp>
         <p:sp>
           <p:nvSpPr>
-            <p:cNvPr id="977" name="tx977"/>
+            <p:cNvPr id="985" name="tx985"/>
             <p:cNvSpPr/>
             <p:nvPr/>
           </p:nvSpPr>
@@ -36636,7 +38681,7 @@
         </p:sp>
         <p:sp>
           <p:nvSpPr>
-            <p:cNvPr id="978" name="tx978"/>
+            <p:cNvPr id="986" name="tx986"/>
             <p:cNvSpPr/>
             <p:nvPr/>
           </p:nvSpPr>
